--- a/plots/accum/Taxa_accumulation_curves_edits.pptx
+++ b/plots/accum/Taxa_accumulation_curves_edits.pptx
@@ -128,7 +128,7 @@
   <pc:docChgLst>
     <pc:chgData name="ROSS, ETHAN (PGR)" userId="64022231-9dc0-4c9d-8854-6af795d8551c" providerId="ADAL" clId="{880863F2-3482-48C8-89D0-4A563D9758EA}"/>
     <pc:docChg chg="undo custSel addSld delSld modSld">
-      <pc:chgData name="ROSS, ETHAN (PGR)" userId="64022231-9dc0-4c9d-8854-6af795d8551c" providerId="ADAL" clId="{880863F2-3482-48C8-89D0-4A563D9758EA}" dt="2025-10-20T08:44:40.692" v="417" actId="478"/>
+      <pc:chgData name="ROSS, ETHAN (PGR)" userId="64022231-9dc0-4c9d-8854-6af795d8551c" providerId="ADAL" clId="{880863F2-3482-48C8-89D0-4A563D9758EA}" dt="2025-10-28T10:56:13.460" v="429" actId="14100"/>
       <pc:docMkLst>
         <pc:docMk/>
       </pc:docMkLst>
@@ -161,11 +161,19 @@
         </pc:sldMkLst>
       </pc:sldChg>
       <pc:sldChg chg="addSp delSp modSp add mod">
-        <pc:chgData name="ROSS, ETHAN (PGR)" userId="64022231-9dc0-4c9d-8854-6af795d8551c" providerId="ADAL" clId="{880863F2-3482-48C8-89D0-4A563D9758EA}" dt="2025-10-20T08:44:40.692" v="417" actId="478"/>
+        <pc:chgData name="ROSS, ETHAN (PGR)" userId="64022231-9dc0-4c9d-8854-6af795d8551c" providerId="ADAL" clId="{880863F2-3482-48C8-89D0-4A563D9758EA}" dt="2025-10-28T10:56:13.460" v="429" actId="14100"/>
         <pc:sldMkLst>
           <pc:docMk/>
           <pc:sldMk cId="2515918615" sldId="260"/>
         </pc:sldMkLst>
+        <pc:spChg chg="add mod ord">
+          <ac:chgData name="ROSS, ETHAN (PGR)" userId="64022231-9dc0-4c9d-8854-6af795d8551c" providerId="ADAL" clId="{880863F2-3482-48C8-89D0-4A563D9758EA}" dt="2025-10-28T10:56:13.460" v="429" actId="14100"/>
+          <ac:spMkLst>
+            <pc:docMk/>
+            <pc:sldMk cId="2515918615" sldId="260"/>
+            <ac:spMk id="2" creationId="{053069D1-458C-E8EF-6C16-146C1FD76BBF}"/>
+          </ac:spMkLst>
+        </pc:spChg>
         <pc:spChg chg="add mod">
           <ac:chgData name="ROSS, ETHAN (PGR)" userId="64022231-9dc0-4c9d-8854-6af795d8551c" providerId="ADAL" clId="{880863F2-3482-48C8-89D0-4A563D9758EA}" dt="2025-10-17T11:06:14.106" v="382" actId="12788"/>
           <ac:spMkLst>
@@ -358,14 +366,6 @@
             <ac:spMk id="77" creationId="{D6D55922-0836-A9C6-3F5F-A4E92A20CFD4}"/>
           </ac:spMkLst>
         </pc:spChg>
-        <pc:picChg chg="add del mod">
-          <ac:chgData name="ROSS, ETHAN (PGR)" userId="64022231-9dc0-4c9d-8854-6af795d8551c" providerId="ADAL" clId="{880863F2-3482-48C8-89D0-4A563D9758EA}" dt="2025-10-20T08:44:40.692" v="417" actId="478"/>
-          <ac:picMkLst>
-            <pc:docMk/>
-            <pc:sldMk cId="2515918615" sldId="260"/>
-            <ac:picMk id="3" creationId="{69207EDC-BE69-D59C-434E-FE8443102239}"/>
-          </ac:picMkLst>
-        </pc:picChg>
         <pc:picChg chg="add mod ord modCrop">
           <ac:chgData name="ROSS, ETHAN (PGR)" userId="64022231-9dc0-4c9d-8854-6af795d8551c" providerId="ADAL" clId="{880863F2-3482-48C8-89D0-4A563D9758EA}" dt="2025-10-17T11:20:03.117" v="411" actId="167"/>
           <ac:picMkLst>
@@ -534,7 +534,7 @@
           <a:p>
             <a:fld id="{F5E1B7C7-BBD0-46FA-9326-7399DC6BB146}" type="datetimeFigureOut">
               <a:rPr lang="en-GB" smtClean="0"/>
-              <a:t>20/10/2025</a:t>
+              <a:t>28/10/2025</a:t>
             </a:fld>
             <a:endParaRPr lang="en-GB"/>
           </a:p>
@@ -1059,7 +1059,7 @@
           <a:p>
             <a:fld id="{34C86A21-2D1A-497C-99E5-52E38473515D}" type="datetimeFigureOut">
               <a:rPr lang="en-GB" smtClean="0"/>
-              <a:t>20/10/2025</a:t>
+              <a:t>28/10/2025</a:t>
             </a:fld>
             <a:endParaRPr lang="en-GB"/>
           </a:p>
@@ -1259,7 +1259,7 @@
           <a:p>
             <a:fld id="{34C86A21-2D1A-497C-99E5-52E38473515D}" type="datetimeFigureOut">
               <a:rPr lang="en-GB" smtClean="0"/>
-              <a:t>20/10/2025</a:t>
+              <a:t>28/10/2025</a:t>
             </a:fld>
             <a:endParaRPr lang="en-GB"/>
           </a:p>
@@ -1469,7 +1469,7 @@
           <a:p>
             <a:fld id="{34C86A21-2D1A-497C-99E5-52E38473515D}" type="datetimeFigureOut">
               <a:rPr lang="en-GB" smtClean="0"/>
-              <a:t>20/10/2025</a:t>
+              <a:t>28/10/2025</a:t>
             </a:fld>
             <a:endParaRPr lang="en-GB"/>
           </a:p>
@@ -1669,7 +1669,7 @@
           <a:p>
             <a:fld id="{34C86A21-2D1A-497C-99E5-52E38473515D}" type="datetimeFigureOut">
               <a:rPr lang="en-GB" smtClean="0"/>
-              <a:t>20/10/2025</a:t>
+              <a:t>28/10/2025</a:t>
             </a:fld>
             <a:endParaRPr lang="en-GB"/>
           </a:p>
@@ -1945,7 +1945,7 @@
           <a:p>
             <a:fld id="{34C86A21-2D1A-497C-99E5-52E38473515D}" type="datetimeFigureOut">
               <a:rPr lang="en-GB" smtClean="0"/>
-              <a:t>20/10/2025</a:t>
+              <a:t>28/10/2025</a:t>
             </a:fld>
             <a:endParaRPr lang="en-GB"/>
           </a:p>
@@ -2213,7 +2213,7 @@
           <a:p>
             <a:fld id="{34C86A21-2D1A-497C-99E5-52E38473515D}" type="datetimeFigureOut">
               <a:rPr lang="en-GB" smtClean="0"/>
-              <a:t>20/10/2025</a:t>
+              <a:t>28/10/2025</a:t>
             </a:fld>
             <a:endParaRPr lang="en-GB"/>
           </a:p>
@@ -2628,7 +2628,7 @@
           <a:p>
             <a:fld id="{34C86A21-2D1A-497C-99E5-52E38473515D}" type="datetimeFigureOut">
               <a:rPr lang="en-GB" smtClean="0"/>
-              <a:t>20/10/2025</a:t>
+              <a:t>28/10/2025</a:t>
             </a:fld>
             <a:endParaRPr lang="en-GB"/>
           </a:p>
@@ -2770,7 +2770,7 @@
           <a:p>
             <a:fld id="{34C86A21-2D1A-497C-99E5-52E38473515D}" type="datetimeFigureOut">
               <a:rPr lang="en-GB" smtClean="0"/>
-              <a:t>20/10/2025</a:t>
+              <a:t>28/10/2025</a:t>
             </a:fld>
             <a:endParaRPr lang="en-GB"/>
           </a:p>
@@ -2883,7 +2883,7 @@
           <a:p>
             <a:fld id="{34C86A21-2D1A-497C-99E5-52E38473515D}" type="datetimeFigureOut">
               <a:rPr lang="en-GB" smtClean="0"/>
-              <a:t>20/10/2025</a:t>
+              <a:t>28/10/2025</a:t>
             </a:fld>
             <a:endParaRPr lang="en-GB"/>
           </a:p>
@@ -3196,7 +3196,7 @@
           <a:p>
             <a:fld id="{34C86A21-2D1A-497C-99E5-52E38473515D}" type="datetimeFigureOut">
               <a:rPr lang="en-GB" smtClean="0"/>
-              <a:t>20/10/2025</a:t>
+              <a:t>28/10/2025</a:t>
             </a:fld>
             <a:endParaRPr lang="en-GB"/>
           </a:p>
@@ -3485,7 +3485,7 @@
           <a:p>
             <a:fld id="{34C86A21-2D1A-497C-99E5-52E38473515D}" type="datetimeFigureOut">
               <a:rPr lang="en-GB" smtClean="0"/>
-              <a:t>20/10/2025</a:t>
+              <a:t>28/10/2025</a:t>
             </a:fld>
             <a:endParaRPr lang="en-GB"/>
           </a:p>
@@ -3728,7 +3728,7 @@
           <a:p>
             <a:fld id="{34C86A21-2D1A-497C-99E5-52E38473515D}" type="datetimeFigureOut">
               <a:rPr lang="en-GB" smtClean="0"/>
-              <a:t>20/10/2025</a:t>
+              <a:t>28/10/2025</a:t>
             </a:fld>
             <a:endParaRPr lang="en-GB"/>
           </a:p>
@@ -4151,6 +4151,58 @@
           <a:chExt cx="0" cy="0"/>
         </a:xfrm>
       </p:grpSpPr>
+      <p:sp>
+        <p:nvSpPr>
+          <p:cNvPr id="2" name="Rectangle 1">
+            <a:extLst>
+              <a:ext uri="{FF2B5EF4-FFF2-40B4-BE49-F238E27FC236}">
+                <a16:creationId xmlns:a16="http://schemas.microsoft.com/office/drawing/2014/main" id="{053069D1-458C-E8EF-6C16-146C1FD76BBF}"/>
+              </a:ext>
+            </a:extLst>
+          </p:cNvPr>
+          <p:cNvSpPr/>
+          <p:nvPr/>
+        </p:nvSpPr>
+        <p:spPr>
+          <a:xfrm>
+            <a:off x="7166286" y="0"/>
+            <a:ext cx="2301099" cy="6858000"/>
+          </a:xfrm>
+          <a:prstGeom prst="rect">
+            <a:avLst/>
+          </a:prstGeom>
+          <a:solidFill>
+            <a:schemeClr val="bg1"/>
+          </a:solidFill>
+          <a:ln>
+            <a:noFill/>
+          </a:ln>
+        </p:spPr>
+        <p:style>
+          <a:lnRef idx="2">
+            <a:schemeClr val="accent1">
+              <a:shade val="15000"/>
+            </a:schemeClr>
+          </a:lnRef>
+          <a:fillRef idx="1">
+            <a:schemeClr val="accent1"/>
+          </a:fillRef>
+          <a:effectRef idx="0">
+            <a:schemeClr val="accent1"/>
+          </a:effectRef>
+          <a:fontRef idx="minor">
+            <a:schemeClr val="lt1"/>
+          </a:fontRef>
+        </p:style>
+        <p:txBody>
+          <a:bodyPr rtlCol="0" anchor="ctr"/>
+          <a:lstStyle/>
+          <a:p>
+            <a:pPr algn="ctr"/>
+            <a:endParaRPr lang="en-GB"/>
+          </a:p>
+        </p:txBody>
+      </p:sp>
       <p:pic>
         <p:nvPicPr>
           <p:cNvPr id="60" name="Picture 59" descr="A graph of samples with numbers and symbols&#10;&#10;AI-generated content may be incorrect.">
